--- a/docs/GDP_FanChart_제안_1p_2026-07-27.pptx
+++ b/docs/GDP_FanChart_제안_1p_2026-07-27.pptx
@@ -5,9 +5,9 @@
     <p:sldMasterId id="2147483648" r:id="rId1"/>
   </p:sldMasterIdLst>
   <p:sldIdLst>
-    <p:sldId id="256" r:id="rId7"/>
+    <p:sldId id="256" r:id="rId2"/>
   </p:sldIdLst>
-  <p:sldSz cx="12191695" cy="6858000" type="screen4x3"/>
+  <p:sldSz cx="12192000" cy="6858000"/>
   <p:notesSz cx="6858000" cy="9144000"/>
   <p:defaultTextStyle>
     <a:defPPr>
@@ -104,6 +104,22 @@
       </a:defRPr>
     </a:lvl9pPr>
   </p:defaultTextStyle>
+  <p:extLst>
+    <p:ext uri="{EFAFB233-063F-42B5-8137-9DF3F51BA10A}">
+      <p15:sldGuideLst xmlns:p15="http://schemas.microsoft.com/office/powerpoint/2012/main">
+        <p15:guide id="1" orient="horz" pos="2160">
+          <p15:clr>
+            <a:srgbClr val="A4A3A4"/>
+          </p15:clr>
+        </p15:guide>
+        <p15:guide id="2" pos="2880">
+          <p15:clr>
+            <a:srgbClr val="A4A3A4"/>
+          </p15:clr>
+        </p15:guide>
+      </p15:sldGuideLst>
+    </p:ext>
+  </p:extLst>
 </p:presentation>
 </file>
 
@@ -145,10 +161,9 @@
           <a:lstStyle/>
           <a:p>
             <a:r>
-              <a:rPr lang="en-US" smtClean="0"/>
+              <a:rPr lang="en-US"/>
               <a:t>Click to edit Master title style</a:t>
             </a:r>
-            <a:endParaRPr lang="en-US"/>
           </a:p>
         </p:txBody>
       </p:sp>
@@ -264,10 +279,9 @@
           </a:lstStyle>
           <a:p>
             <a:r>
-              <a:rPr lang="en-US" smtClean="0"/>
+              <a:rPr lang="en-US"/>
               <a:t>Click to edit Master subtitle style</a:t>
             </a:r>
-            <a:endParaRPr lang="en-US"/>
           </a:p>
         </p:txBody>
       </p:sp>
@@ -288,7 +302,7 @@
           <a:p>
             <a:fld id="{5BCAD085-E8A6-8845-BD4E-CB4CCA059FC4}" type="datetimeFigureOut">
               <a:rPr lang="en-US" smtClean="0"/>
-              <a:t>1/27/13</a:t>
+              <a:t>7/27/26</a:t>
             </a:fld>
             <a:endParaRPr lang="en-US"/>
           </a:p>
@@ -382,10 +396,9 @@
           <a:lstStyle/>
           <a:p>
             <a:r>
-              <a:rPr lang="en-US" smtClean="0"/>
+              <a:rPr lang="en-US"/>
               <a:t>Click to edit Master title style</a:t>
             </a:r>
-            <a:endParaRPr lang="en-US"/>
           </a:p>
         </p:txBody>
       </p:sp>
@@ -406,38 +419,37 @@
           <a:p>
             <a:pPr lvl="0"/>
             <a:r>
-              <a:rPr lang="en-US" smtClean="0"/>
+              <a:rPr lang="en-US"/>
               <a:t>Click to edit Master text styles</a:t>
             </a:r>
           </a:p>
           <a:p>
             <a:pPr lvl="1"/>
             <a:r>
-              <a:rPr lang="en-US" smtClean="0"/>
+              <a:rPr lang="en-US"/>
               <a:t>Second level</a:t>
             </a:r>
           </a:p>
           <a:p>
             <a:pPr lvl="2"/>
             <a:r>
-              <a:rPr lang="en-US" smtClean="0"/>
+              <a:rPr lang="en-US"/>
               <a:t>Third level</a:t>
             </a:r>
           </a:p>
           <a:p>
             <a:pPr lvl="3"/>
             <a:r>
-              <a:rPr lang="en-US" smtClean="0"/>
+              <a:rPr lang="en-US"/>
               <a:t>Fourth level</a:t>
             </a:r>
           </a:p>
           <a:p>
             <a:pPr lvl="4"/>
             <a:r>
-              <a:rPr lang="en-US" smtClean="0"/>
+              <a:rPr lang="en-US"/>
               <a:t>Fifth level</a:t>
             </a:r>
-            <a:endParaRPr lang="en-US"/>
           </a:p>
         </p:txBody>
       </p:sp>
@@ -458,7 +470,7 @@
           <a:p>
             <a:fld id="{5BCAD085-E8A6-8845-BD4E-CB4CCA059FC4}" type="datetimeFigureOut">
               <a:rPr lang="en-US" smtClean="0"/>
-              <a:t>1/27/13</a:t>
+              <a:t>7/27/26</a:t>
             </a:fld>
             <a:endParaRPr lang="en-US"/>
           </a:p>
@@ -557,10 +569,9 @@
           <a:lstStyle/>
           <a:p>
             <a:r>
-              <a:rPr lang="en-US" smtClean="0"/>
+              <a:rPr lang="en-US"/>
               <a:t>Click to edit Master title style</a:t>
             </a:r>
-            <a:endParaRPr lang="en-US"/>
           </a:p>
         </p:txBody>
       </p:sp>
@@ -586,38 +597,37 @@
           <a:p>
             <a:pPr lvl="0"/>
             <a:r>
-              <a:rPr lang="en-US" smtClean="0"/>
+              <a:rPr lang="en-US"/>
               <a:t>Click to edit Master text styles</a:t>
             </a:r>
           </a:p>
           <a:p>
             <a:pPr lvl="1"/>
             <a:r>
-              <a:rPr lang="en-US" smtClean="0"/>
+              <a:rPr lang="en-US"/>
               <a:t>Second level</a:t>
             </a:r>
           </a:p>
           <a:p>
             <a:pPr lvl="2"/>
             <a:r>
-              <a:rPr lang="en-US" smtClean="0"/>
+              <a:rPr lang="en-US"/>
               <a:t>Third level</a:t>
             </a:r>
           </a:p>
           <a:p>
             <a:pPr lvl="3"/>
             <a:r>
-              <a:rPr lang="en-US" smtClean="0"/>
+              <a:rPr lang="en-US"/>
               <a:t>Fourth level</a:t>
             </a:r>
           </a:p>
           <a:p>
             <a:pPr lvl="4"/>
             <a:r>
-              <a:rPr lang="en-US" smtClean="0"/>
+              <a:rPr lang="en-US"/>
               <a:t>Fifth level</a:t>
             </a:r>
-            <a:endParaRPr lang="en-US"/>
           </a:p>
         </p:txBody>
       </p:sp>
@@ -638,7 +648,7 @@
           <a:p>
             <a:fld id="{5BCAD085-E8A6-8845-BD4E-CB4CCA059FC4}" type="datetimeFigureOut">
               <a:rPr lang="en-US" smtClean="0"/>
-              <a:t>1/27/13</a:t>
+              <a:t>7/27/26</a:t>
             </a:fld>
             <a:endParaRPr lang="en-US"/>
           </a:p>
@@ -732,10 +742,9 @@
           <a:lstStyle/>
           <a:p>
             <a:r>
-              <a:rPr lang="en-US" smtClean="0"/>
+              <a:rPr lang="en-US"/>
               <a:t>Click to edit Master title style</a:t>
             </a:r>
-            <a:endParaRPr lang="en-US"/>
           </a:p>
         </p:txBody>
       </p:sp>
@@ -756,38 +765,37 @@
           <a:p>
             <a:pPr lvl="0"/>
             <a:r>
-              <a:rPr lang="en-US" smtClean="0"/>
+              <a:rPr lang="en-US"/>
               <a:t>Click to edit Master text styles</a:t>
             </a:r>
           </a:p>
           <a:p>
             <a:pPr lvl="1"/>
             <a:r>
-              <a:rPr lang="en-US" smtClean="0"/>
+              <a:rPr lang="en-US"/>
               <a:t>Second level</a:t>
             </a:r>
           </a:p>
           <a:p>
             <a:pPr lvl="2"/>
             <a:r>
-              <a:rPr lang="en-US" smtClean="0"/>
+              <a:rPr lang="en-US"/>
               <a:t>Third level</a:t>
             </a:r>
           </a:p>
           <a:p>
             <a:pPr lvl="3"/>
             <a:r>
-              <a:rPr lang="en-US" smtClean="0"/>
+              <a:rPr lang="en-US"/>
               <a:t>Fourth level</a:t>
             </a:r>
           </a:p>
           <a:p>
             <a:pPr lvl="4"/>
             <a:r>
-              <a:rPr lang="en-US" smtClean="0"/>
+              <a:rPr lang="en-US"/>
               <a:t>Fifth level</a:t>
             </a:r>
-            <a:endParaRPr lang="en-US"/>
           </a:p>
         </p:txBody>
       </p:sp>
@@ -808,7 +816,7 @@
           <a:p>
             <a:fld id="{5BCAD085-E8A6-8845-BD4E-CB4CCA059FC4}" type="datetimeFigureOut">
               <a:rPr lang="en-US" smtClean="0"/>
-              <a:t>1/27/13</a:t>
+              <a:t>7/27/26</a:t>
             </a:fld>
             <a:endParaRPr lang="en-US"/>
           </a:p>
@@ -911,10 +919,9 @@
           </a:lstStyle>
           <a:p>
             <a:r>
-              <a:rPr lang="en-US" smtClean="0"/>
+              <a:rPr lang="en-US"/>
               <a:t>Click to edit Master title style</a:t>
             </a:r>
-            <a:endParaRPr lang="en-US"/>
           </a:p>
         </p:txBody>
       </p:sp>
@@ -1031,7 +1038,7 @@
           <a:p>
             <a:pPr lvl="0"/>
             <a:r>
-              <a:rPr lang="en-US" smtClean="0"/>
+              <a:rPr lang="en-US"/>
               <a:t>Click to edit Master text styles</a:t>
             </a:r>
           </a:p>
@@ -1054,7 +1061,7 @@
           <a:p>
             <a:fld id="{5BCAD085-E8A6-8845-BD4E-CB4CCA059FC4}" type="datetimeFigureOut">
               <a:rPr lang="en-US" smtClean="0"/>
-              <a:t>1/27/13</a:t>
+              <a:t>7/27/26</a:t>
             </a:fld>
             <a:endParaRPr lang="en-US"/>
           </a:p>
@@ -1148,10 +1155,9 @@
           <a:lstStyle/>
           <a:p>
             <a:r>
-              <a:rPr lang="en-US" smtClean="0"/>
+              <a:rPr lang="en-US"/>
               <a:t>Click to edit Master title style</a:t>
             </a:r>
-            <a:endParaRPr lang="en-US"/>
           </a:p>
         </p:txBody>
       </p:sp>
@@ -1205,38 +1211,37 @@
           <a:p>
             <a:pPr lvl="0"/>
             <a:r>
-              <a:rPr lang="en-US" smtClean="0"/>
+              <a:rPr lang="en-US"/>
               <a:t>Click to edit Master text styles</a:t>
             </a:r>
           </a:p>
           <a:p>
             <a:pPr lvl="1"/>
             <a:r>
-              <a:rPr lang="en-US" smtClean="0"/>
+              <a:rPr lang="en-US"/>
               <a:t>Second level</a:t>
             </a:r>
           </a:p>
           <a:p>
             <a:pPr lvl="2"/>
             <a:r>
-              <a:rPr lang="en-US" smtClean="0"/>
+              <a:rPr lang="en-US"/>
               <a:t>Third level</a:t>
             </a:r>
           </a:p>
           <a:p>
             <a:pPr lvl="3"/>
             <a:r>
-              <a:rPr lang="en-US" smtClean="0"/>
+              <a:rPr lang="en-US"/>
               <a:t>Fourth level</a:t>
             </a:r>
           </a:p>
           <a:p>
             <a:pPr lvl="4"/>
             <a:r>
-              <a:rPr lang="en-US" smtClean="0"/>
+              <a:rPr lang="en-US"/>
               <a:t>Fifth level</a:t>
             </a:r>
-            <a:endParaRPr lang="en-US"/>
           </a:p>
         </p:txBody>
       </p:sp>
@@ -1290,38 +1295,37 @@
           <a:p>
             <a:pPr lvl="0"/>
             <a:r>
-              <a:rPr lang="en-US" smtClean="0"/>
+              <a:rPr lang="en-US"/>
               <a:t>Click to edit Master text styles</a:t>
             </a:r>
           </a:p>
           <a:p>
             <a:pPr lvl="1"/>
             <a:r>
-              <a:rPr lang="en-US" smtClean="0"/>
+              <a:rPr lang="en-US"/>
               <a:t>Second level</a:t>
             </a:r>
           </a:p>
           <a:p>
             <a:pPr lvl="2"/>
             <a:r>
-              <a:rPr lang="en-US" smtClean="0"/>
+              <a:rPr lang="en-US"/>
               <a:t>Third level</a:t>
             </a:r>
           </a:p>
           <a:p>
             <a:pPr lvl="3"/>
             <a:r>
-              <a:rPr lang="en-US" smtClean="0"/>
+              <a:rPr lang="en-US"/>
               <a:t>Fourth level</a:t>
             </a:r>
           </a:p>
           <a:p>
             <a:pPr lvl="4"/>
             <a:r>
-              <a:rPr lang="en-US" smtClean="0"/>
+              <a:rPr lang="en-US"/>
               <a:t>Fifth level</a:t>
             </a:r>
-            <a:endParaRPr lang="en-US"/>
           </a:p>
         </p:txBody>
       </p:sp>
@@ -1342,7 +1346,7 @@
           <a:p>
             <a:fld id="{5BCAD085-E8A6-8845-BD4E-CB4CCA059FC4}" type="datetimeFigureOut">
               <a:rPr lang="en-US" smtClean="0"/>
-              <a:t>1/27/13</a:t>
+              <a:t>7/27/26</a:t>
             </a:fld>
             <a:endParaRPr lang="en-US"/>
           </a:p>
@@ -1440,10 +1444,9 @@
           </a:lstStyle>
           <a:p>
             <a:r>
-              <a:rPr lang="en-US" smtClean="0"/>
+              <a:rPr lang="en-US"/>
               <a:t>Click to edit Master title style</a:t>
             </a:r>
-            <a:endParaRPr lang="en-US"/>
           </a:p>
         </p:txBody>
       </p:sp>
@@ -1506,7 +1509,7 @@
           <a:p>
             <a:pPr lvl="0"/>
             <a:r>
-              <a:rPr lang="en-US" smtClean="0"/>
+              <a:rPr lang="en-US"/>
               <a:t>Click to edit Master text styles</a:t>
             </a:r>
           </a:p>
@@ -1562,38 +1565,37 @@
           <a:p>
             <a:pPr lvl="0"/>
             <a:r>
-              <a:rPr lang="en-US" smtClean="0"/>
+              <a:rPr lang="en-US"/>
               <a:t>Click to edit Master text styles</a:t>
             </a:r>
           </a:p>
           <a:p>
             <a:pPr lvl="1"/>
             <a:r>
-              <a:rPr lang="en-US" smtClean="0"/>
+              <a:rPr lang="en-US"/>
               <a:t>Second level</a:t>
             </a:r>
           </a:p>
           <a:p>
             <a:pPr lvl="2"/>
             <a:r>
-              <a:rPr lang="en-US" smtClean="0"/>
+              <a:rPr lang="en-US"/>
               <a:t>Third level</a:t>
             </a:r>
           </a:p>
           <a:p>
             <a:pPr lvl="3"/>
             <a:r>
-              <a:rPr lang="en-US" smtClean="0"/>
+              <a:rPr lang="en-US"/>
               <a:t>Fourth level</a:t>
             </a:r>
           </a:p>
           <a:p>
             <a:pPr lvl="4"/>
             <a:r>
-              <a:rPr lang="en-US" smtClean="0"/>
+              <a:rPr lang="en-US"/>
               <a:t>Fifth level</a:t>
             </a:r>
-            <a:endParaRPr lang="en-US"/>
           </a:p>
         </p:txBody>
       </p:sp>
@@ -1656,7 +1658,7 @@
           <a:p>
             <a:pPr lvl="0"/>
             <a:r>
-              <a:rPr lang="en-US" smtClean="0"/>
+              <a:rPr lang="en-US"/>
               <a:t>Click to edit Master text styles</a:t>
             </a:r>
           </a:p>
@@ -1712,38 +1714,37 @@
           <a:p>
             <a:pPr lvl="0"/>
             <a:r>
-              <a:rPr lang="en-US" smtClean="0"/>
+              <a:rPr lang="en-US"/>
               <a:t>Click to edit Master text styles</a:t>
             </a:r>
           </a:p>
           <a:p>
             <a:pPr lvl="1"/>
             <a:r>
-              <a:rPr lang="en-US" smtClean="0"/>
+              <a:rPr lang="en-US"/>
               <a:t>Second level</a:t>
             </a:r>
           </a:p>
           <a:p>
             <a:pPr lvl="2"/>
             <a:r>
-              <a:rPr lang="en-US" smtClean="0"/>
+              <a:rPr lang="en-US"/>
               <a:t>Third level</a:t>
             </a:r>
           </a:p>
           <a:p>
             <a:pPr lvl="3"/>
             <a:r>
-              <a:rPr lang="en-US" smtClean="0"/>
+              <a:rPr lang="en-US"/>
               <a:t>Fourth level</a:t>
             </a:r>
           </a:p>
           <a:p>
             <a:pPr lvl="4"/>
             <a:r>
-              <a:rPr lang="en-US" smtClean="0"/>
+              <a:rPr lang="en-US"/>
               <a:t>Fifth level</a:t>
             </a:r>
-            <a:endParaRPr lang="en-US"/>
           </a:p>
         </p:txBody>
       </p:sp>
@@ -1764,7 +1765,7 @@
           <a:p>
             <a:fld id="{5BCAD085-E8A6-8845-BD4E-CB4CCA059FC4}" type="datetimeFigureOut">
               <a:rPr lang="en-US" smtClean="0"/>
-              <a:t>1/27/13</a:t>
+              <a:t>7/27/26</a:t>
             </a:fld>
             <a:endParaRPr lang="en-US"/>
           </a:p>
@@ -1858,10 +1859,9 @@
           <a:lstStyle/>
           <a:p>
             <a:r>
-              <a:rPr lang="en-US" smtClean="0"/>
+              <a:rPr lang="en-US"/>
               <a:t>Click to edit Master title style</a:t>
             </a:r>
-            <a:endParaRPr lang="en-US"/>
           </a:p>
         </p:txBody>
       </p:sp>
@@ -1882,7 +1882,7 @@
           <a:p>
             <a:fld id="{5BCAD085-E8A6-8845-BD4E-CB4CCA059FC4}" type="datetimeFigureOut">
               <a:rPr lang="en-US" smtClean="0"/>
-              <a:t>1/27/13</a:t>
+              <a:t>7/27/26</a:t>
             </a:fld>
             <a:endParaRPr lang="en-US"/>
           </a:p>
@@ -1977,7 +1977,7 @@
           <a:p>
             <a:fld id="{5BCAD085-E8A6-8845-BD4E-CB4CCA059FC4}" type="datetimeFigureOut">
               <a:rPr lang="en-US" smtClean="0"/>
-              <a:t>1/27/13</a:t>
+              <a:t>7/27/26</a:t>
             </a:fld>
             <a:endParaRPr lang="en-US"/>
           </a:p>
@@ -2080,10 +2080,9 @@
           </a:lstStyle>
           <a:p>
             <a:r>
-              <a:rPr lang="en-US" smtClean="0"/>
+              <a:rPr lang="en-US"/>
               <a:t>Click to edit Master title style</a:t>
             </a:r>
-            <a:endParaRPr lang="en-US"/>
           </a:p>
         </p:txBody>
       </p:sp>
@@ -2137,38 +2136,37 @@
           <a:p>
             <a:pPr lvl="0"/>
             <a:r>
-              <a:rPr lang="en-US" smtClean="0"/>
+              <a:rPr lang="en-US"/>
               <a:t>Click to edit Master text styles</a:t>
             </a:r>
           </a:p>
           <a:p>
             <a:pPr lvl="1"/>
             <a:r>
-              <a:rPr lang="en-US" smtClean="0"/>
+              <a:rPr lang="en-US"/>
               <a:t>Second level</a:t>
             </a:r>
           </a:p>
           <a:p>
             <a:pPr lvl="2"/>
             <a:r>
-              <a:rPr lang="en-US" smtClean="0"/>
+              <a:rPr lang="en-US"/>
               <a:t>Third level</a:t>
             </a:r>
           </a:p>
           <a:p>
             <a:pPr lvl="3"/>
             <a:r>
-              <a:rPr lang="en-US" smtClean="0"/>
+              <a:rPr lang="en-US"/>
               <a:t>Fourth level</a:t>
             </a:r>
           </a:p>
           <a:p>
             <a:pPr lvl="4"/>
             <a:r>
-              <a:rPr lang="en-US" smtClean="0"/>
+              <a:rPr lang="en-US"/>
               <a:t>Fifth level</a:t>
             </a:r>
-            <a:endParaRPr lang="en-US"/>
           </a:p>
         </p:txBody>
       </p:sp>
@@ -2231,7 +2229,7 @@
           <a:p>
             <a:pPr lvl="0"/>
             <a:r>
-              <a:rPr lang="en-US" smtClean="0"/>
+              <a:rPr lang="en-US"/>
               <a:t>Click to edit Master text styles</a:t>
             </a:r>
           </a:p>
@@ -2254,7 +2252,7 @@
           <a:p>
             <a:fld id="{5BCAD085-E8A6-8845-BD4E-CB4CCA059FC4}" type="datetimeFigureOut">
               <a:rPr lang="en-US" smtClean="0"/>
-              <a:t>1/27/13</a:t>
+              <a:t>7/27/26</a:t>
             </a:fld>
             <a:endParaRPr lang="en-US"/>
           </a:p>
@@ -2357,10 +2355,9 @@
           </a:lstStyle>
           <a:p>
             <a:r>
-              <a:rPr lang="en-US" smtClean="0"/>
+              <a:rPr lang="en-US"/>
               <a:t>Click to edit Master title style</a:t>
             </a:r>
-            <a:endParaRPr lang="en-US"/>
           </a:p>
         </p:txBody>
       </p:sp>
@@ -2484,7 +2481,7 @@
           <a:p>
             <a:pPr lvl="0"/>
             <a:r>
-              <a:rPr lang="en-US" smtClean="0"/>
+              <a:rPr lang="en-US"/>
               <a:t>Click to edit Master text styles</a:t>
             </a:r>
           </a:p>
@@ -2507,7 +2504,7 @@
           <a:p>
             <a:fld id="{5BCAD085-E8A6-8845-BD4E-CB4CCA059FC4}" type="datetimeFigureOut">
               <a:rPr lang="en-US" smtClean="0"/>
-              <a:t>1/27/13</a:t>
+              <a:t>7/27/26</a:t>
             </a:fld>
             <a:endParaRPr lang="en-US"/>
           </a:p>
@@ -2616,10 +2613,9 @@
           <a:lstStyle/>
           <a:p>
             <a:r>
-              <a:rPr lang="en-US" smtClean="0"/>
+              <a:rPr lang="en-US"/>
               <a:t>Click to edit Master title style</a:t>
             </a:r>
-            <a:endParaRPr lang="en-US"/>
           </a:p>
         </p:txBody>
       </p:sp>
@@ -2650,38 +2646,37 @@
           <a:p>
             <a:pPr lvl="0"/>
             <a:r>
-              <a:rPr lang="en-US" smtClean="0"/>
+              <a:rPr lang="en-US"/>
               <a:t>Click to edit Master text styles</a:t>
             </a:r>
           </a:p>
           <a:p>
             <a:pPr lvl="1"/>
             <a:r>
-              <a:rPr lang="en-US" smtClean="0"/>
+              <a:rPr lang="en-US"/>
               <a:t>Second level</a:t>
             </a:r>
           </a:p>
           <a:p>
             <a:pPr lvl="2"/>
             <a:r>
-              <a:rPr lang="en-US" smtClean="0"/>
+              <a:rPr lang="en-US"/>
               <a:t>Third level</a:t>
             </a:r>
           </a:p>
           <a:p>
             <a:pPr lvl="3"/>
             <a:r>
-              <a:rPr lang="en-US" smtClean="0"/>
+              <a:rPr lang="en-US"/>
               <a:t>Fourth level</a:t>
             </a:r>
           </a:p>
           <a:p>
             <a:pPr lvl="4"/>
             <a:r>
-              <a:rPr lang="en-US" smtClean="0"/>
+              <a:rPr lang="en-US"/>
               <a:t>Fifth level</a:t>
             </a:r>
-            <a:endParaRPr lang="en-US"/>
           </a:p>
         </p:txBody>
       </p:sp>
@@ -2720,7 +2715,7 @@
           <a:p>
             <a:fld id="{5BCAD085-E8A6-8845-BD4E-CB4CCA059FC4}" type="datetimeFigureOut">
               <a:rPr lang="en-US" smtClean="0"/>
-              <a:t>1/27/13</a:t>
+              <a:t>7/27/26</a:t>
             </a:fld>
             <a:endParaRPr lang="en-US"/>
           </a:p>
@@ -3079,7 +3074,7 @@
 </file>
 
 <file path=ppt/slides/slide1.xml><?xml version="1.0" encoding="utf-8"?>
-<p:sld xmlns:a="http://schemas.openxmlformats.org/drawingml/2006/main" xmlns:p="http://schemas.openxmlformats.org/presentationml/2006/main" xmlns:r="http://schemas.openxmlformats.org/officeDocument/2006/relationships">
+<p:sld xmlns:a="http://schemas.openxmlformats.org/drawingml/2006/main" xmlns:r="http://schemas.openxmlformats.org/officeDocument/2006/relationships" xmlns:p="http://schemas.openxmlformats.org/presentationml/2006/main">
   <p:cSld>
     <p:spTree>
       <p:nvGrpSpPr>
@@ -3087,7 +3082,14 @@
         <p:cNvGrpSpPr/>
         <p:nvPr/>
       </p:nvGrpSpPr>
-      <p:grpSpPr/>
+      <p:grpSpPr>
+        <a:xfrm>
+          <a:off x="0" y="0"/>
+          <a:ext cx="0" cy="0"/>
+          <a:chOff x="0" y="0"/>
+          <a:chExt cx="0" cy="0"/>
+        </a:xfrm>
+      </p:grpSpPr>
       <p:sp>
         <p:nvSpPr>
           <p:cNvPr id="2" name="TextBox 1"/>
@@ -3097,7 +3099,7 @@
         <p:spPr>
           <a:xfrm>
             <a:off x="502920" y="237744"/>
-            <a:ext cx="10058400" cy="502920"/>
+            <a:ext cx="10058400" cy="360099"/>
           </a:xfrm>
           <a:prstGeom prst="rect">
             <a:avLst/>
@@ -3105,7 +3107,7 @@
           <a:noFill/>
         </p:spPr>
         <p:txBody>
-          <a:bodyPr wrap="square" anchor="t" lIns="45720" rIns="45720" tIns="18288" bIns="18288">
+          <a:bodyPr wrap="square" lIns="45720" tIns="18288" rIns="45720" bIns="18288" anchor="t">
             <a:spAutoFit/>
           </a:bodyPr>
           <a:lstStyle/>
@@ -3120,8 +3122,8 @@
                 <a:solidFill>
                   <a:srgbClr val="243447"/>
                 </a:solidFill>
-                <a:latin typeface="Apple SD Gothic Neo"/>
-                <a:ea typeface="Apple SD Gothic Neo"/>
+                <a:latin typeface="NanumSquare Neo Regular" pitchFamily="2" charset="-127"/>
+                <a:ea typeface="NanumSquare Neo Regular" pitchFamily="2" charset="-127"/>
               </a:rPr>
               <a:t>GDP 나우캐스트 Fan Chart — 예측은 그대로, 불확실성을 입힙니다</a:t>
             </a:r>
@@ -3137,7 +3139,7 @@
         <p:spPr>
           <a:xfrm>
             <a:off x="10332720" y="329184"/>
-            <a:ext cx="1371600" cy="365760"/>
+            <a:ext cx="1371600" cy="190821"/>
           </a:xfrm>
           <a:prstGeom prst="rect">
             <a:avLst/>
@@ -3145,7 +3147,7 @@
           <a:noFill/>
         </p:spPr>
         <p:txBody>
-          <a:bodyPr wrap="square" anchor="t" lIns="45720" rIns="45720" tIns="18288" bIns="18288">
+          <a:bodyPr wrap="square" lIns="45720" tIns="18288" rIns="45720" bIns="18288" anchor="t">
             <a:spAutoFit/>
           </a:bodyPr>
           <a:lstStyle/>
@@ -3160,8 +3162,8 @@
                 <a:solidFill>
                   <a:srgbClr val="6B6B6B"/>
                 </a:solidFill>
-                <a:latin typeface="Apple SD Gothic Neo"/>
-                <a:ea typeface="Apple SD Gothic Neo"/>
+                <a:latin typeface="NanumSquare Neo Regular" pitchFamily="2" charset="-127"/>
+                <a:ea typeface="NanumSquare Neo Regular" pitchFamily="2" charset="-127"/>
               </a:rPr>
               <a:t>AX Lab | 2026. 07.</a:t>
             </a:r>
@@ -3212,7 +3214,7 @@
         <p:spPr>
           <a:xfrm>
             <a:off x="502920" y="877824"/>
-            <a:ext cx="11155680" cy="384048"/>
+            <a:ext cx="11155680" cy="221599"/>
           </a:xfrm>
           <a:prstGeom prst="rect">
             <a:avLst/>
@@ -3220,7 +3222,7 @@
           <a:noFill/>
         </p:spPr>
         <p:txBody>
-          <a:bodyPr wrap="square" anchor="t" lIns="45720" rIns="45720" tIns="18288" bIns="18288">
+          <a:bodyPr wrap="square" lIns="45720" tIns="18288" rIns="45720" bIns="18288" anchor="t">
             <a:spAutoFit/>
           </a:bodyPr>
           <a:lstStyle/>
@@ -3235,8 +3237,8 @@
                 <a:solidFill>
                   <a:srgbClr val="262626"/>
                 </a:solidFill>
-                <a:latin typeface="Apple SD Gothic Neo"/>
-                <a:ea typeface="Apple SD Gothic Neo"/>
+                <a:latin typeface="NanumSquare Neo Regular" pitchFamily="2" charset="-127"/>
+                <a:ea typeface="NanumSquare Neo Regular" pitchFamily="2" charset="-127"/>
               </a:rPr>
               <a:t>현행 점 전망(DFM+XGBoost)은 한 글자도 바꾸지 않고, 주차별 예측구간(50·80%)을 부여 — </a:t>
             </a:r>
@@ -3245,8 +3247,8 @@
                 <a:solidFill>
                   <a:srgbClr val="008A3E"/>
                 </a:solidFill>
-                <a:latin typeface="Apple SD Gothic Neo"/>
-                <a:ea typeface="Apple SD Gothic Neo"/>
+                <a:latin typeface="NanumSquare Neo Regular" pitchFamily="2" charset="-127"/>
+                <a:ea typeface="NanumSquare Neo Regular" pitchFamily="2" charset="-127"/>
               </a:rPr>
               <a:t>실시간 검증 커버리지 81~87% (명목 80%)</a:t>
             </a:r>
@@ -3262,7 +3264,7 @@
         <p:spPr>
           <a:xfrm>
             <a:off x="502920" y="1389888"/>
-            <a:ext cx="3383280" cy="310896"/>
+            <a:ext cx="3383280" cy="229294"/>
           </a:xfrm>
           <a:prstGeom prst="rect">
             <a:avLst/>
@@ -3270,7 +3272,7 @@
           <a:noFill/>
         </p:spPr>
         <p:txBody>
-          <a:bodyPr wrap="square" anchor="t" lIns="45720" rIns="45720" tIns="18288" bIns="18288">
+          <a:bodyPr wrap="square" lIns="45720" tIns="18288" rIns="45720" bIns="18288" anchor="t">
             <a:spAutoFit/>
           </a:bodyPr>
           <a:lstStyle/>
@@ -3285,8 +3287,8 @@
                 <a:solidFill>
                   <a:srgbClr val="008A3E"/>
                 </a:solidFill>
-                <a:latin typeface="Apple SD Gothic Neo"/>
-                <a:ea typeface="Apple SD Gothic Neo"/>
+                <a:latin typeface="NanumSquare Neo Regular" pitchFamily="2" charset="-127"/>
+                <a:ea typeface="NanumSquare Neo Regular" pitchFamily="2" charset="-127"/>
               </a:rPr>
               <a:t>01  </a:t>
             </a:r>
@@ -3295,8 +3297,8 @@
                 <a:solidFill>
                   <a:srgbClr val="243447"/>
                 </a:solidFill>
-                <a:latin typeface="Apple SD Gothic Neo"/>
-                <a:ea typeface="Apple SD Gothic Neo"/>
+                <a:latin typeface="NanumSquare Neo Regular" pitchFamily="2" charset="-127"/>
+                <a:ea typeface="NanumSquare Neo Regular" pitchFamily="2" charset="-127"/>
               </a:rPr>
               <a:t>방법 — 예측 불변 부가 레이어</a:t>
             </a:r>
@@ -3347,7 +3349,7 @@
         <p:spPr>
           <a:xfrm>
             <a:off x="502920" y="1810512"/>
-            <a:ext cx="3383280" cy="4114800"/>
+            <a:ext cx="3383280" cy="2222147"/>
           </a:xfrm>
           <a:prstGeom prst="rect">
             <a:avLst/>
@@ -3355,7 +3357,7 @@
           <a:noFill/>
         </p:spPr>
         <p:txBody>
-          <a:bodyPr wrap="square" anchor="t" lIns="45720" rIns="45720" tIns="18288" bIns="18288">
+          <a:bodyPr wrap="square" lIns="45720" tIns="18288" rIns="45720" bIns="18288" anchor="t">
             <a:spAutoFit/>
           </a:bodyPr>
           <a:lstStyle/>
@@ -3370,8 +3372,8 @@
                 <a:solidFill>
                   <a:srgbClr val="262626"/>
                 </a:solidFill>
-                <a:latin typeface="Apple SD Gothic Neo"/>
-                <a:ea typeface="Apple SD Gothic Neo"/>
+                <a:latin typeface="NanumSquare Neo Regular" pitchFamily="2" charset="-127"/>
+                <a:ea typeface="NanumSquare Neo Regular" pitchFamily="2" charset="-127"/>
               </a:rPr>
               <a:t>중심선 = 현행 점 전망 그대로</a:t>
             </a:r>
@@ -3387,8 +3389,8 @@
                 <a:solidFill>
                   <a:srgbClr val="262626"/>
                 </a:solidFill>
-                <a:latin typeface="Apple SD Gothic Neo"/>
-                <a:ea typeface="Apple SD Gothic Neo"/>
+                <a:latin typeface="NanumSquare Neo Regular" pitchFamily="2" charset="-127"/>
+                <a:ea typeface="NanumSquare Neo Regular" pitchFamily="2" charset="-127"/>
               </a:rPr>
               <a:t>· 모형·스킴 변경 없음. 구간만 얹음</a:t>
             </a:r>
@@ -3404,8 +3406,8 @@
                 <a:solidFill>
                   <a:srgbClr val="262626"/>
                 </a:solidFill>
-                <a:latin typeface="Apple SD Gothic Neo"/>
-                <a:ea typeface="Apple SD Gothic Neo"/>
+                <a:latin typeface="NanumSquare Neo Regular" pitchFamily="2" charset="-127"/>
+                <a:ea typeface="NanumSquare Neo Regular" pitchFamily="2" charset="-127"/>
               </a:rPr>
               <a:t>구간 = 과거 실시간 오차의 경험분포</a:t>
             </a:r>
@@ -3421,8 +3423,8 @@
                 <a:solidFill>
                   <a:srgbClr val="262626"/>
                 </a:solidFill>
-                <a:latin typeface="Apple SD Gothic Neo"/>
-                <a:ea typeface="Apple SD Gothic Neo"/>
+                <a:latin typeface="NanumSquare Neo Regular" pitchFamily="2" charset="-127"/>
+                <a:ea typeface="NanumSquare Neo Regular" pitchFamily="2" charset="-127"/>
               </a:rPr>
               <a:t>· 컨포멀 예측: 분포 가정 없이 통계적</a:t>
             </a:r>
@@ -3438,8 +3440,8 @@
                 <a:solidFill>
                   <a:srgbClr val="262626"/>
                 </a:solidFill>
-                <a:latin typeface="Apple SD Gothic Neo"/>
-                <a:ea typeface="Apple SD Gothic Neo"/>
+                <a:latin typeface="NanumSquare Neo Regular" pitchFamily="2" charset="-127"/>
+                <a:ea typeface="NanumSquare Neo Regular" pitchFamily="2" charset="-127"/>
               </a:rPr>
               <a:t>  보장, 전망주차 구간별로 폭 차등</a:t>
             </a:r>
@@ -3455,8 +3457,8 @@
                 <a:solidFill>
                   <a:srgbClr val="262626"/>
                 </a:solidFill>
-                <a:latin typeface="Apple SD Gothic Neo"/>
-                <a:ea typeface="Apple SD Gothic Neo"/>
+                <a:latin typeface="NanumSquare Neo Regular" pitchFamily="2" charset="-127"/>
+                <a:ea typeface="NanumSquare Neo Regular" pitchFamily="2" charset="-127"/>
               </a:rPr>
               <a:t>· 학습·보정에 미래정보 미사용</a:t>
             </a:r>
@@ -3472,8 +3474,8 @@
                 <a:solidFill>
                   <a:srgbClr val="6B6B6B"/>
                 </a:solidFill>
-                <a:latin typeface="Apple SD Gothic Neo"/>
-                <a:ea typeface="Apple SD Gothic Neo"/>
+                <a:latin typeface="NanumSquare Neo Regular" pitchFamily="2" charset="-127"/>
+                <a:ea typeface="NanumSquare Neo Regular" pitchFamily="2" charset="-127"/>
               </a:rPr>
               <a:t>  (확장창, 발표 전 분기 제외)</a:t>
             </a:r>
@@ -3489,8 +3491,8 @@
                 <a:solidFill>
                   <a:srgbClr val="262626"/>
                 </a:solidFill>
-                <a:latin typeface="Apple SD Gothic Neo"/>
-                <a:ea typeface="Apple SD Gothic Neo"/>
+                <a:latin typeface="NanumSquare Neo Regular" pitchFamily="2" charset="-127"/>
+                <a:ea typeface="NanumSquare Neo Regular" pitchFamily="2" charset="-127"/>
               </a:rPr>
               <a:t>조기 주차 정밀화 (딥러닝 기여)</a:t>
             </a:r>
@@ -3506,8 +3508,8 @@
                 <a:solidFill>
                   <a:srgbClr val="262626"/>
                 </a:solidFill>
-                <a:latin typeface="Apple SD Gothic Neo"/>
-                <a:ea typeface="Apple SD Gothic Neo"/>
+                <a:latin typeface="NanumSquare Neo Regular" pitchFamily="2" charset="-127"/>
+                <a:ea typeface="NanumSquare Neo Regular" pitchFamily="2" charset="-127"/>
               </a:rPr>
               <a:t>· 발표 19~14주 전 구간은 사전학습</a:t>
             </a:r>
@@ -3523,8 +3525,8 @@
                 <a:solidFill>
                   <a:srgbClr val="262626"/>
                 </a:solidFill>
-                <a:latin typeface="Apple SD Gothic Neo"/>
-                <a:ea typeface="Apple SD Gothic Neo"/>
+                <a:latin typeface="NanumSquare Neo Regular" pitchFamily="2" charset="-127"/>
+                <a:ea typeface="NanumSquare Neo Regular" pitchFamily="2" charset="-127"/>
               </a:rPr>
               <a:t>  시계열 모델(Chronos-2)의 분포를</a:t>
             </a:r>
@@ -3540,8 +3542,8 @@
                 <a:solidFill>
                   <a:srgbClr val="262626"/>
                 </a:solidFill>
-                <a:latin typeface="Apple SD Gothic Neo"/>
-                <a:ea typeface="Apple SD Gothic Neo"/>
+                <a:latin typeface="NanumSquare Neo Regular" pitchFamily="2" charset="-127"/>
+                <a:ea typeface="NanumSquare Neo Regular" pitchFamily="2" charset="-127"/>
               </a:rPr>
               <a:t>  같은 방식으로 보정해 사용</a:t>
             </a:r>
@@ -3557,8 +3559,8 @@
                 <a:solidFill>
                   <a:srgbClr val="262626"/>
                 </a:solidFill>
-                <a:latin typeface="Apple SD Gothic Neo"/>
-                <a:ea typeface="Apple SD Gothic Neo"/>
+                <a:latin typeface="NanumSquare Neo Regular" pitchFamily="2" charset="-127"/>
+                <a:ea typeface="NanumSquare Neo Regular" pitchFamily="2" charset="-127"/>
               </a:rPr>
               <a:t>· 전망 시계별 조건화 — 국면 판단이</a:t>
             </a:r>
@@ -3574,8 +3576,8 @@
                 <a:solidFill>
                   <a:srgbClr val="6B6B6B"/>
                 </a:solidFill>
-                <a:latin typeface="Apple SD Gothic Neo"/>
-                <a:ea typeface="Apple SD Gothic Neo"/>
+                <a:latin typeface="NanumSquare Neo Regular" pitchFamily="2" charset="-127"/>
+                <a:ea typeface="NanumSquare Neo Regular" pitchFamily="2" charset="-127"/>
               </a:rPr>
               <a:t>  아닌 표준 관행</a:t>
             </a:r>
@@ -3591,7 +3593,7 @@
         <p:spPr>
           <a:xfrm>
             <a:off x="502920" y="4544568"/>
-            <a:ext cx="3383280" cy="1280160"/>
+            <a:ext cx="3383280" cy="697114"/>
           </a:xfrm>
           <a:prstGeom prst="rect">
             <a:avLst/>
@@ -3599,7 +3601,7 @@
           <a:noFill/>
         </p:spPr>
         <p:txBody>
-          <a:bodyPr wrap="square" anchor="t" lIns="45720" rIns="45720" tIns="18288" bIns="18288">
+          <a:bodyPr wrap="square" lIns="45720" tIns="18288" rIns="45720" bIns="18288" anchor="t">
             <a:spAutoFit/>
           </a:bodyPr>
           <a:lstStyle/>
@@ -3614,8 +3616,8 @@
                 <a:solidFill>
                   <a:srgbClr val="243447"/>
                 </a:solidFill>
-                <a:latin typeface="Apple SD Gothic Neo"/>
-                <a:ea typeface="Apple SD Gothic Neo"/>
+                <a:latin typeface="NanumSquare Neo Regular" pitchFamily="2" charset="-127"/>
+                <a:ea typeface="NanumSquare Neo Regular" pitchFamily="2" charset="-127"/>
               </a:rPr>
               <a:t>도입 형태</a:t>
             </a:r>
@@ -3631,8 +3633,8 @@
                 <a:solidFill>
                   <a:srgbClr val="262626"/>
                 </a:solidFill>
-                <a:latin typeface="Apple SD Gothic Neo"/>
-                <a:ea typeface="Apple SD Gothic Neo"/>
+                <a:latin typeface="NanumSquare Neo Regular" pitchFamily="2" charset="-127"/>
+                <a:ea typeface="NanumSquare Neo Regular" pitchFamily="2" charset="-127"/>
               </a:rPr>
               <a:t>· 주간 전망 보고서에 그림 1장 추가가 전부</a:t>
             </a:r>
@@ -3648,8 +3650,8 @@
                 <a:solidFill>
                   <a:srgbClr val="262626"/>
                 </a:solidFill>
-                <a:latin typeface="Apple SD Gothic Neo"/>
-                <a:ea typeface="Apple SD Gothic Neo"/>
+                <a:latin typeface="NanumSquare Neo Regular" pitchFamily="2" charset="-127"/>
+                <a:ea typeface="NanumSquare Neo Regular" pitchFamily="2" charset="-127"/>
               </a:rPr>
               <a:t>· 기존 파이프라인 무수정 (산출물만 소비)</a:t>
             </a:r>
@@ -3665,8 +3667,8 @@
                 <a:solidFill>
                   <a:srgbClr val="262626"/>
                 </a:solidFill>
-                <a:latin typeface="Apple SD Gothic Neo"/>
-                <a:ea typeface="Apple SD Gothic Neo"/>
+                <a:latin typeface="NanumSquare Neo Regular" pitchFamily="2" charset="-127"/>
+                <a:ea typeface="NanumSquare Neo Regular" pitchFamily="2" charset="-127"/>
               </a:rPr>
               <a:t>· 전 코드 재현 가능 형태로 이관</a:t>
             </a:r>
@@ -3682,7 +3684,7 @@
         <p:spPr>
           <a:xfrm>
             <a:off x="4160520" y="1389888"/>
-            <a:ext cx="3291840" cy="310896"/>
+            <a:ext cx="3291840" cy="229294"/>
           </a:xfrm>
           <a:prstGeom prst="rect">
             <a:avLst/>
@@ -3690,7 +3692,7 @@
           <a:noFill/>
         </p:spPr>
         <p:txBody>
-          <a:bodyPr wrap="square" anchor="t" lIns="45720" rIns="45720" tIns="18288" bIns="18288">
+          <a:bodyPr wrap="square" lIns="45720" tIns="18288" rIns="45720" bIns="18288" anchor="t">
             <a:spAutoFit/>
           </a:bodyPr>
           <a:lstStyle/>
@@ -3705,8 +3707,8 @@
                 <a:solidFill>
                   <a:srgbClr val="008A3E"/>
                 </a:solidFill>
-                <a:latin typeface="Apple SD Gothic Neo"/>
-                <a:ea typeface="Apple SD Gothic Neo"/>
+                <a:latin typeface="NanumSquare Neo Regular" pitchFamily="2" charset="-127"/>
+                <a:ea typeface="NanumSquare Neo Regular" pitchFamily="2" charset="-127"/>
               </a:rPr>
               <a:t>02  </a:t>
             </a:r>
@@ -3715,8 +3717,8 @@
                 <a:solidFill>
                   <a:srgbClr val="243447"/>
                 </a:solidFill>
-                <a:latin typeface="Apple SD Gothic Neo"/>
-                <a:ea typeface="Apple SD Gothic Neo"/>
+                <a:latin typeface="NanumSquare Neo Regular" pitchFamily="2" charset="-127"/>
+                <a:ea typeface="NanumSquare Neo Regular" pitchFamily="2" charset="-127"/>
               </a:rPr>
               <a:t>실시간 검증 (2020~2025, 23분기)</a:t>
             </a:r>
@@ -3768,7 +3770,7 @@
         </p:nvGraphicFramePr>
         <p:xfrm>
           <a:off x="4160520" y="1847088"/>
-          <a:ext cx="3291840" cy="1463040"/>
+          <a:ext cx="3291840" cy="1470352"/>
         </p:xfrm>
         <a:graphic>
           <a:graphicData uri="http://schemas.openxmlformats.org/drawingml/2006/table">
@@ -3777,9 +3779,27 @@
                 <a:tableStyleId>{5C22544A-7EE6-4342-B048-85BDC9FD1C3A}</a:tableStyleId>
               </a:tblPr>
               <a:tblGrid>
-                <a:gridCol w="1691640"/>
-                <a:gridCol w="777240"/>
-                <a:gridCol w="822960"/>
+                <a:gridCol w="1691640">
+                  <a:extLst>
+                    <a:ext uri="{9D8B030D-6E8A-4147-A177-3AD203B41FA5}">
+                      <a16:colId xmlns:a16="http://schemas.microsoft.com/office/drawing/2014/main" val="20000"/>
+                    </a:ext>
+                  </a:extLst>
+                </a:gridCol>
+                <a:gridCol w="777240">
+                  <a:extLst>
+                    <a:ext uri="{9D8B030D-6E8A-4147-A177-3AD203B41FA5}">
+                      <a16:colId xmlns:a16="http://schemas.microsoft.com/office/drawing/2014/main" val="20001"/>
+                    </a:ext>
+                  </a:extLst>
+                </a:gridCol>
+                <a:gridCol w="822960">
+                  <a:extLst>
+                    <a:ext uri="{9D8B030D-6E8A-4147-A177-3AD203B41FA5}">
+                      <a16:colId xmlns:a16="http://schemas.microsoft.com/office/drawing/2014/main" val="20002"/>
+                    </a:ext>
+                  </a:extLst>
+                </a:gridCol>
               </a:tblGrid>
               <a:tr h="292608">
                 <a:tc>
@@ -3836,16 +3856,7 @@
                     <a:lstStyle/>
                     <a:p>
                       <a:pPr algn="ctr"/>
-                      <a:r>
-                        <a:rPr sz="880" b="1">
-                          <a:solidFill>
-                            <a:srgbClr val="FFFFFF"/>
-                          </a:solidFill>
-                          <a:latin typeface="Apple SD Gothic Neo"/>
-                          <a:ea typeface="Apple SD Gothic Neo"/>
-                        </a:rPr>
-                        <a:t/>
-                      </a:r>
+                      <a:endParaRPr/>
                     </a:p>
                   </a:txBody>
                   <a:tcPr marL="36576" marR="27432" marT="10972" marB="10972">
@@ -3854,6 +3865,11 @@
                     </a:solidFill>
                   </a:tcPr>
                 </a:tc>
+                <a:extLst>
+                  <a:ext uri="{0D108BD9-81ED-4DB2-BD59-A6C34878D82A}">
+                    <a16:rowId xmlns:a16="http://schemas.microsoft.com/office/drawing/2014/main" val="10000"/>
+                  </a:ext>
+                </a:extLst>
               </a:tr>
               <a:tr h="292608">
                 <a:tc>
@@ -3928,6 +3944,11 @@
                     </a:solidFill>
                   </a:tcPr>
                 </a:tc>
+                <a:extLst>
+                  <a:ext uri="{0D108BD9-81ED-4DB2-BD59-A6C34878D82A}">
+                    <a16:rowId xmlns:a16="http://schemas.microsoft.com/office/drawing/2014/main" val="10001"/>
+                  </a:ext>
+                </a:extLst>
               </a:tr>
               <a:tr h="292608">
                 <a:tc>
@@ -3984,16 +4005,7 @@
                     <a:lstStyle/>
                     <a:p>
                       <a:pPr algn="ctr"/>
-                      <a:r>
-                        <a:rPr sz="880" b="0">
-                          <a:solidFill>
-                            <a:srgbClr val="262626"/>
-                          </a:solidFill>
-                          <a:latin typeface="Apple SD Gothic Neo"/>
-                          <a:ea typeface="Apple SD Gothic Neo"/>
-                        </a:rPr>
-                        <a:t/>
-                      </a:r>
+                      <a:endParaRPr/>
                     </a:p>
                   </a:txBody>
                   <a:tcPr marL="36576" marR="27432" marT="10972" marB="10972">
@@ -4002,6 +4014,11 @@
                     </a:solidFill>
                   </a:tcPr>
                 </a:tc>
+                <a:extLst>
+                  <a:ext uri="{0D108BD9-81ED-4DB2-BD59-A6C34878D82A}">
+                    <a16:rowId xmlns:a16="http://schemas.microsoft.com/office/drawing/2014/main" val="10002"/>
+                  </a:ext>
+                </a:extLst>
               </a:tr>
               <a:tr h="292608">
                 <a:tc>
@@ -4076,6 +4093,11 @@
                     </a:solidFill>
                   </a:tcPr>
                 </a:tc>
+                <a:extLst>
+                  <a:ext uri="{0D108BD9-81ED-4DB2-BD59-A6C34878D82A}">
+                    <a16:rowId xmlns:a16="http://schemas.microsoft.com/office/drawing/2014/main" val="10003"/>
+                  </a:ext>
+                </a:extLst>
               </a:tr>
               <a:tr h="292608">
                 <a:tc>
@@ -4150,6 +4172,11 @@
                     </a:solidFill>
                   </a:tcPr>
                 </a:tc>
+                <a:extLst>
+                  <a:ext uri="{0D108BD9-81ED-4DB2-BD59-A6C34878D82A}">
+                    <a16:rowId xmlns:a16="http://schemas.microsoft.com/office/drawing/2014/main" val="10004"/>
+                  </a:ext>
+                </a:extLst>
               </a:tr>
             </a:tbl>
           </a:graphicData>
@@ -4164,7 +4191,7 @@
         <p:spPr>
           <a:xfrm>
             <a:off x="4160520" y="3447288"/>
-            <a:ext cx="3291840" cy="2377440"/>
+            <a:ext cx="3291840" cy="1709699"/>
           </a:xfrm>
           <a:prstGeom prst="rect">
             <a:avLst/>
@@ -4172,7 +4199,7 @@
           <a:noFill/>
         </p:spPr>
         <p:txBody>
-          <a:bodyPr wrap="square" anchor="t" lIns="45720" rIns="45720" tIns="18288" bIns="18288">
+          <a:bodyPr wrap="square" lIns="45720" tIns="18288" rIns="45720" bIns="18288" anchor="t">
             <a:spAutoFit/>
           </a:bodyPr>
           <a:lstStyle/>
@@ -4187,8 +4214,8 @@
                 <a:solidFill>
                   <a:srgbClr val="262626"/>
                 </a:solidFill>
-                <a:latin typeface="Apple SD Gothic Neo"/>
-                <a:ea typeface="Apple SD Gothic Neo"/>
+                <a:latin typeface="NanumSquare Neo Regular" pitchFamily="2" charset="-127"/>
+                <a:ea typeface="NanumSquare Neo Regular" pitchFamily="2" charset="-127"/>
               </a:rPr>
               <a:t>의의</a:t>
             </a:r>
@@ -4204,8 +4231,8 @@
                 <a:solidFill>
                   <a:srgbClr val="262626"/>
                 </a:solidFill>
-                <a:latin typeface="Apple SD Gothic Neo"/>
-                <a:ea typeface="Apple SD Gothic Neo"/>
+                <a:latin typeface="NanumSquare Neo Regular" pitchFamily="2" charset="-127"/>
+                <a:ea typeface="NanumSquare Neo Regular" pitchFamily="2" charset="-127"/>
               </a:rPr>
               <a:t>· 현행 시스템은 점추정만 제공 — 전망의</a:t>
             </a:r>
@@ -4221,8 +4248,8 @@
                 <a:solidFill>
                   <a:srgbClr val="262626"/>
                 </a:solidFill>
-                <a:latin typeface="Apple SD Gothic Neo"/>
-                <a:ea typeface="Apple SD Gothic Neo"/>
+                <a:latin typeface="NanumSquare Neo Regular" pitchFamily="2" charset="-127"/>
+                <a:ea typeface="NanumSquare Neo Regular" pitchFamily="2" charset="-127"/>
               </a:rPr>
               <a:t>  불확실성이 보고서에 수치로 없음</a:t>
             </a:r>
@@ -4238,8 +4265,8 @@
                 <a:solidFill>
                   <a:srgbClr val="262626"/>
                 </a:solidFill>
-                <a:latin typeface="Apple SD Gothic Neo"/>
-                <a:ea typeface="Apple SD Gothic Neo"/>
+                <a:latin typeface="NanumSquare Neo Regular" pitchFamily="2" charset="-127"/>
+                <a:ea typeface="NanumSquare Neo Regular" pitchFamily="2" charset="-127"/>
               </a:rPr>
               <a:t>· 주요 중앙은행 관행(BoE Inflation Report</a:t>
             </a:r>
@@ -4255,8 +4282,8 @@
                 <a:solidFill>
                   <a:srgbClr val="262626"/>
                 </a:solidFill>
-                <a:latin typeface="Apple SD Gothic Neo"/>
-                <a:ea typeface="Apple SD Gothic Neo"/>
+                <a:latin typeface="NanumSquare Neo Regular" pitchFamily="2" charset="-127"/>
+                <a:ea typeface="NanumSquare Neo Regular" pitchFamily="2" charset="-127"/>
               </a:rPr>
               <a:t>  fan chart)과 동일한 커뮤니케이션 형식</a:t>
             </a:r>
@@ -4272,8 +4299,8 @@
                 <a:solidFill>
                   <a:srgbClr val="262626"/>
                 </a:solidFill>
-                <a:latin typeface="Apple SD Gothic Neo"/>
-                <a:ea typeface="Apple SD Gothic Neo"/>
+                <a:latin typeface="NanumSquare Neo Regular" pitchFamily="2" charset="-127"/>
+                <a:ea typeface="NanumSquare Neo Regular" pitchFamily="2" charset="-127"/>
               </a:rPr>
               <a:t>· 발표가 다가올수록 구간이 수축 —</a:t>
             </a:r>
@@ -4289,8 +4316,8 @@
                 <a:solidFill>
                   <a:srgbClr val="262626"/>
                 </a:solidFill>
-                <a:latin typeface="Apple SD Gothic Neo"/>
-                <a:ea typeface="Apple SD Gothic Neo"/>
+                <a:latin typeface="NanumSquare Neo Regular" pitchFamily="2" charset="-127"/>
+                <a:ea typeface="NanumSquare Neo Regular" pitchFamily="2" charset="-127"/>
               </a:rPr>
               <a:t>  "확신의 정도"가 주차별로 표현됨</a:t>
             </a:r>
@@ -4306,8 +4333,8 @@
                 <a:solidFill>
                   <a:srgbClr val="262626"/>
                 </a:solidFill>
-                <a:latin typeface="Apple SD Gothic Neo"/>
-                <a:ea typeface="Apple SD Gothic Neo"/>
+                <a:latin typeface="NanumSquare Neo Regular" pitchFamily="2" charset="-127"/>
+                <a:ea typeface="NanumSquare Neo Regular" pitchFamily="2" charset="-127"/>
               </a:rPr>
               <a:t>· 다음 단계: 한은 뉴스심리지수(NSI) 결합</a:t>
             </a:r>
@@ -4323,8 +4350,8 @@
                 <a:solidFill>
                   <a:srgbClr val="262626"/>
                 </a:solidFill>
-                <a:latin typeface="Apple SD Gothic Neo"/>
-                <a:ea typeface="Apple SD Gothic Neo"/>
+                <a:latin typeface="NanumSquare Neo Regular" pitchFamily="2" charset="-127"/>
+                <a:ea typeface="NanumSquare Neo Regular" pitchFamily="2" charset="-127"/>
               </a:rPr>
               <a:t>  으로 조기 구간 정밀화, 전망 변동</a:t>
             </a:r>
@@ -4340,8 +4367,8 @@
                 <a:solidFill>
                   <a:srgbClr val="262626"/>
                 </a:solidFill>
-                <a:latin typeface="Apple SD Gothic Neo"/>
-                <a:ea typeface="Apple SD Gothic Neo"/>
+                <a:latin typeface="NanumSquare Neo Regular" pitchFamily="2" charset="-127"/>
+                <a:ea typeface="NanumSquare Neo Regular" pitchFamily="2" charset="-127"/>
               </a:rPr>
               <a:t>  자동 설명 리포트와 통합</a:t>
             </a:r>
@@ -4357,7 +4384,7 @@
         <p:spPr>
           <a:xfrm>
             <a:off x="7726679" y="1389888"/>
-            <a:ext cx="3977639" cy="310896"/>
+            <a:ext cx="3977639" cy="229294"/>
           </a:xfrm>
           <a:prstGeom prst="rect">
             <a:avLst/>
@@ -4365,7 +4392,7 @@
           <a:noFill/>
         </p:spPr>
         <p:txBody>
-          <a:bodyPr wrap="square" anchor="t" lIns="45720" rIns="45720" tIns="18288" bIns="18288">
+          <a:bodyPr wrap="square" lIns="45720" tIns="18288" rIns="45720" bIns="18288" anchor="t">
             <a:spAutoFit/>
           </a:bodyPr>
           <a:lstStyle/>
@@ -4380,8 +4407,8 @@
                 <a:solidFill>
                   <a:srgbClr val="008A3E"/>
                 </a:solidFill>
-                <a:latin typeface="Apple SD Gothic Neo"/>
-                <a:ea typeface="Apple SD Gothic Neo"/>
+                <a:latin typeface="NanumSquare Neo Regular" pitchFamily="2" charset="-127"/>
+                <a:ea typeface="NanumSquare Neo Regular" pitchFamily="2" charset="-127"/>
               </a:rPr>
               <a:t>03  </a:t>
             </a:r>
@@ -4390,8 +4417,8 @@
                 <a:solidFill>
                   <a:srgbClr val="243447"/>
                 </a:solidFill>
-                <a:latin typeface="Apple SD Gothic Neo"/>
-                <a:ea typeface="Apple SD Gothic Neo"/>
+                <a:latin typeface="NanumSquare Neo Regular" pitchFamily="2" charset="-127"/>
+                <a:ea typeface="NanumSquare Neo Regular" pitchFamily="2" charset="-127"/>
               </a:rPr>
               <a:t>예시 — 2025년 2·3분기 (실시간 재현)</a:t>
             </a:r>
@@ -4466,7 +4493,7 @@
         <p:spPr>
           <a:xfrm>
             <a:off x="7726679" y="3904487"/>
-            <a:ext cx="3977639" cy="640080"/>
+            <a:ext cx="3977639" cy="333425"/>
           </a:xfrm>
           <a:prstGeom prst="rect">
             <a:avLst/>
@@ -4474,7 +4501,7 @@
           <a:noFill/>
         </p:spPr>
         <p:txBody>
-          <a:bodyPr wrap="square" anchor="t" lIns="45720" rIns="45720" tIns="18288" bIns="18288">
+          <a:bodyPr wrap="square" lIns="45720" tIns="18288" rIns="45720" bIns="18288" anchor="t">
             <a:spAutoFit/>
           </a:bodyPr>
           <a:lstStyle/>
@@ -4489,8 +4516,8 @@
                 <a:solidFill>
                   <a:srgbClr val="6B6B6B"/>
                 </a:solidFill>
-                <a:latin typeface="Apple SD Gothic Neo"/>
-                <a:ea typeface="Apple SD Gothic Neo"/>
+                <a:latin typeface="NanumSquare Neo Regular" pitchFamily="2" charset="-127"/>
+                <a:ea typeface="NanumSquare Neo Regular" pitchFamily="2" charset="-127"/>
               </a:rPr>
               <a:t>점선 = 이후 발표된 실제 속보치. 두 분기 모두 80% 구간 내에서</a:t>
             </a:r>
@@ -4506,8 +4533,8 @@
                 <a:solidFill>
                   <a:srgbClr val="6B6B6B"/>
                 </a:solidFill>
-                <a:latin typeface="Apple SD Gothic Neo"/>
-                <a:ea typeface="Apple SD Gothic Neo"/>
+                <a:latin typeface="NanumSquare Neo Regular" pitchFamily="2" charset="-127"/>
+                <a:ea typeface="NanumSquare Neo Regular" pitchFamily="2" charset="-127"/>
               </a:rPr>
               <a:t>실현 — 반등 국면(2025Q2)에서도 구간이 리스크를 사전에 포괄</a:t>
             </a:r>
@@ -4557,6 +4584,10 @@
           <a:lstStyle/>
           <a:p>
             <a:pPr algn="ctr"/>
+            <a:endParaRPr>
+              <a:latin typeface="NanumSquare Neo Regular" pitchFamily="2" charset="-127"/>
+              <a:ea typeface="NanumSquare Neo Regular" pitchFamily="2" charset="-127"/>
+            </a:endParaRPr>
           </a:p>
         </p:txBody>
       </p:sp>
@@ -4568,8 +4599,8 @@
         </p:nvSpPr>
         <p:spPr>
           <a:xfrm>
-            <a:off x="685800" y="6199632"/>
-            <a:ext cx="10881360" cy="329184"/>
+            <a:off x="685800" y="6272660"/>
+            <a:ext cx="10881360" cy="183127"/>
           </a:xfrm>
           <a:prstGeom prst="rect">
             <a:avLst/>
@@ -4577,7 +4608,7 @@
           <a:noFill/>
         </p:spPr>
         <p:txBody>
-          <a:bodyPr wrap="square" anchor="ctr" lIns="45720" rIns="45720" tIns="18288" bIns="18288">
+          <a:bodyPr wrap="square" lIns="45720" tIns="18288" rIns="45720" bIns="18288" anchor="ctr">
             <a:spAutoFit/>
           </a:bodyPr>
           <a:lstStyle/>
@@ -4592,8 +4623,8 @@
                 <a:solidFill>
                   <a:srgbClr val="243447"/>
                 </a:solidFill>
-                <a:latin typeface="Apple SD Gothic Neo"/>
-                <a:ea typeface="Apple SD Gothic Neo"/>
+                <a:latin typeface="NanumSquare Neo Regular" pitchFamily="2" charset="-127"/>
+                <a:ea typeface="NanumSquare Neo Regular" pitchFamily="2" charset="-127"/>
               </a:rPr>
               <a:t>검증 기준   </a:t>
             </a:r>
@@ -4602,8 +4633,8 @@
                 <a:solidFill>
                   <a:srgbClr val="262626"/>
                 </a:solidFill>
-                <a:latin typeface="Apple SD Gothic Neo"/>
-                <a:ea typeface="Apple SD Gothic Neo"/>
+                <a:latin typeface="NanumSquare Neo Regular" pitchFamily="2" charset="-127"/>
+                <a:ea typeface="NanumSquare Neo Regular" pitchFamily="2" charset="-127"/>
               </a:rPr>
               <a:t>한은 제공 실시간 빈티지, 속보치 기준, 전망주차 w[−19,−1] · 구간 산출에 쓰인 오차는 해당 분기 이전 발표분만 사용 (release-safe)</a:t>
             </a:r>
